--- a/Presentation/VRINDA_AI_ANALYTICS_1.pptx
+++ b/Presentation/VRINDA_AI_ANALYTICS_1.pptx
@@ -2552,7 +2552,7 @@
                 <a:ea typeface="Calibri" pitchFamily="34" charset="-122"/>
                 <a:cs typeface="Calibri" pitchFamily="34" charset="-120"/>
               </a:rPr>
-              <a:t>Data-Driven Decision Making</a:t>
+              <a:t>Data Driven Decision Making</a:t>
             </a:r>
             <a:endParaRPr lang="en-US" sz="2000" dirty="0"/>
           </a:p>
@@ -2616,7 +2616,7 @@
         </p:nvSpPr>
         <p:spPr>
           <a:xfrm>
-            <a:off x="5029200" y="2011680"/>
+            <a:off x="5029200" y="1970476"/>
             <a:ext cx="3840480" cy="365760"/>
           </a:xfrm>
           <a:prstGeom prst="rect">
@@ -2633,7 +2633,7 @@
               <a:buNone/>
             </a:pPr>
             <a:r>
-              <a:rPr lang="en-US" sz="1400" b="1" dirty="0">
+              <a:rPr lang="en-US" sz="1600" b="1" dirty="0">
                 <a:solidFill>
                   <a:srgbClr val="7C3AED"/>
                 </a:solidFill>
@@ -2643,7 +2643,7 @@
               </a:rPr>
               <a:t>Founder &amp; Microsoft Certified Data Analyst</a:t>
             </a:r>
-            <a:endParaRPr lang="en-US" sz="1400" dirty="0"/>
+            <a:endParaRPr lang="en-US" sz="1600" dirty="0"/>
           </a:p>
         </p:txBody>
       </p:sp>
@@ -2680,7 +2680,7 @@
         </p:nvSpPr>
         <p:spPr>
           <a:xfrm>
-            <a:off x="5029200" y="2834640"/>
+            <a:off x="4608576" y="2747716"/>
             <a:ext cx="1188720" cy="502920"/>
           </a:xfrm>
           <a:prstGeom prst="rect">
@@ -2719,7 +2719,7 @@
         </p:nvSpPr>
         <p:spPr>
           <a:xfrm>
-            <a:off x="5029200" y="3291840"/>
+            <a:off x="4608576" y="3204916"/>
             <a:ext cx="1188720" cy="274320"/>
           </a:xfrm>
           <a:prstGeom prst="rect">
@@ -2736,7 +2736,7 @@
               <a:buNone/>
             </a:pPr>
             <a:r>
-              <a:rPr lang="en-US" sz="1050" dirty="0">
+              <a:rPr lang="en-US" sz="1200" b="1" dirty="0">
                 <a:solidFill>
                   <a:srgbClr val="6B7280"/>
                 </a:solidFill>
@@ -2746,7 +2746,7 @@
               </a:rPr>
               <a:t>Years Experience</a:t>
             </a:r>
-            <a:endParaRPr lang="en-US" sz="1050" dirty="0"/>
+            <a:endParaRPr lang="en-US" sz="1200" b="1" dirty="0"/>
           </a:p>
         </p:txBody>
       </p:sp>
@@ -2758,7 +2758,7 @@
         </p:nvSpPr>
         <p:spPr>
           <a:xfrm>
-            <a:off x="6400800" y="2834640"/>
+            <a:off x="5980176" y="2747716"/>
             <a:ext cx="1188720" cy="502920"/>
           </a:xfrm>
           <a:prstGeom prst="rect">
@@ -2797,7 +2797,7 @@
         </p:nvSpPr>
         <p:spPr>
           <a:xfrm>
-            <a:off x="6356195" y="3291840"/>
+            <a:off x="5935571" y="3204916"/>
             <a:ext cx="1188720" cy="274320"/>
           </a:xfrm>
           <a:prstGeom prst="rect">
@@ -2814,7 +2814,7 @@
               <a:buNone/>
             </a:pPr>
             <a:r>
-              <a:rPr lang="en-US" sz="1050" dirty="0">
+              <a:rPr lang="en-US" sz="1200" b="1" dirty="0">
                 <a:solidFill>
                   <a:srgbClr val="6B7280"/>
                 </a:solidFill>
@@ -2824,7 +2824,7 @@
               </a:rPr>
               <a:t>Industries</a:t>
             </a:r>
-            <a:endParaRPr lang="en-US" sz="1050" dirty="0"/>
+            <a:endParaRPr lang="en-US" sz="1200" b="1" dirty="0"/>
           </a:p>
         </p:txBody>
       </p:sp>
@@ -2836,7 +2836,7 @@
         </p:nvSpPr>
         <p:spPr>
           <a:xfrm>
-            <a:off x="7772400" y="2834640"/>
+            <a:off x="7351776" y="2747716"/>
             <a:ext cx="1188720" cy="502920"/>
           </a:xfrm>
           <a:prstGeom prst="rect">
@@ -2875,7 +2875,7 @@
         </p:nvSpPr>
         <p:spPr>
           <a:xfrm>
-            <a:off x="7782437" y="3291840"/>
+            <a:off x="7361813" y="3204916"/>
             <a:ext cx="1188720" cy="274320"/>
           </a:xfrm>
           <a:prstGeom prst="rect">
@@ -2892,7 +2892,7 @@
               <a:buNone/>
             </a:pPr>
             <a:r>
-              <a:rPr lang="en-US" sz="1050" dirty="0">
+              <a:rPr lang="en-US" sz="1200" b="1" dirty="0">
                 <a:solidFill>
                   <a:srgbClr val="6B7280"/>
                 </a:solidFill>
@@ -2902,7 +2902,7 @@
               </a:rPr>
               <a:t>Work Reduced</a:t>
             </a:r>
-            <a:endParaRPr lang="en-US" sz="1050" dirty="0"/>
+            <a:endParaRPr lang="en-US" sz="1200" b="1" dirty="0"/>
           </a:p>
         </p:txBody>
       </p:sp>
@@ -2914,8 +2914,8 @@
         </p:nvSpPr>
         <p:spPr>
           <a:xfrm>
-            <a:off x="5257354" y="3966210"/>
-            <a:ext cx="3840480" cy="320040"/>
+            <a:off x="6135624" y="4215384"/>
+            <a:ext cx="1545782" cy="320040"/>
           </a:xfrm>
           <a:prstGeom prst="rect">
             <a:avLst/>
@@ -2931,7 +2931,7 @@
               <a:buNone/>
             </a:pPr>
             <a:r>
-              <a:rPr lang="en-US" sz="1400" dirty="0">
+              <a:rPr lang="en-US" dirty="0">
                 <a:solidFill>
                   <a:srgbClr val="7C3AED"/>
                 </a:solidFill>
@@ -2939,9 +2939,9 @@
                 <a:ea typeface="Calibri" pitchFamily="34" charset="-122"/>
                 <a:cs typeface="Calibri" pitchFamily="34" charset="-120"/>
               </a:rPr>
-              <a:t>vrindaaianalytics.vercel.app</a:t>
-            </a:r>
-            <a:endParaRPr lang="en-US" sz="1400" dirty="0"/>
+              <a:t>vrindaai.com</a:t>
+            </a:r>
+            <a:endParaRPr lang="en-US" dirty="0"/>
           </a:p>
         </p:txBody>
       </p:sp>
@@ -4539,7 +4539,7 @@
         <p:spPr>
           <a:xfrm>
             <a:off x="429768" y="2931544"/>
-            <a:ext cx="2980945" cy="1329559"/>
+            <a:ext cx="3162709" cy="1329559"/>
           </a:xfrm>
           <a:prstGeom prst="rect">
             <a:avLst/>
@@ -4555,7 +4555,7 @@
               <a:buNone/>
             </a:pPr>
             <a:r>
-              <a:rPr lang="en-US" sz="1600" i="1" dirty="0">
+              <a:rPr lang="en-US" i="1" dirty="0">
                 <a:solidFill>
                   <a:srgbClr val="DDD6FE"/>
                 </a:solidFill>
@@ -4565,14 +4565,14 @@
               </a:rPr>
               <a:t>"We don't just create reports —</a:t>
             </a:r>
-            <a:endParaRPr lang="en-US" sz="1600" dirty="0"/>
+            <a:endParaRPr lang="en-US" dirty="0"/>
           </a:p>
           <a:p>
             <a:pPr marL="0" indent="0">
               <a:buNone/>
             </a:pPr>
             <a:r>
-              <a:rPr lang="en-US" sz="1600" i="1" dirty="0">
+              <a:rPr lang="en-US" i="1" dirty="0">
                 <a:solidFill>
                   <a:srgbClr val="DDD6FE"/>
                 </a:solidFill>
@@ -4580,16 +4580,16 @@
                 <a:ea typeface="Calibri" pitchFamily="34" charset="-122"/>
                 <a:cs typeface="Calibri" pitchFamily="34" charset="-120"/>
               </a:rPr>
-              <a:t>  we build systems that</a:t>
-            </a:r>
-            <a:endParaRPr lang="en-US" sz="1600" dirty="0"/>
+              <a:t>  We build systems that</a:t>
+            </a:r>
+            <a:endParaRPr lang="en-US" dirty="0"/>
           </a:p>
           <a:p>
             <a:pPr marL="0" indent="0">
               <a:buNone/>
             </a:pPr>
             <a:r>
-              <a:rPr lang="en-US" sz="1600" i="1" dirty="0">
+              <a:rPr lang="en-US" i="1" dirty="0">
                 <a:solidFill>
                   <a:srgbClr val="DDD6FE"/>
                 </a:solidFill>
@@ -4599,7 +4599,7 @@
               </a:rPr>
               <a:t>  drive decisions."</a:t>
             </a:r>
-            <a:endParaRPr lang="en-US" sz="1600" dirty="0"/>
+            <a:endParaRPr lang="en-US" dirty="0"/>
           </a:p>
         </p:txBody>
       </p:sp>
@@ -4782,7 +4782,7 @@
                 <a:ea typeface="Calibri" pitchFamily="34" charset="-122"/>
                 <a:cs typeface="Calibri" pitchFamily="34" charset="-120"/>
               </a:rPr>
-              <a:t>vrindaaianalytics@gmail.com</a:t>
+              <a:t>info@vrindaai.com</a:t>
             </a:r>
             <a:endParaRPr lang="en-US" sz="1600" dirty="0"/>
           </a:p>
@@ -5049,8 +5049,8 @@
         </p:nvSpPr>
         <p:spPr>
           <a:xfrm>
-            <a:off x="5321808" y="4261104"/>
-            <a:ext cx="3291840" cy="320040"/>
+            <a:off x="5321808" y="4251960"/>
+            <a:ext cx="2495197" cy="320040"/>
           </a:xfrm>
           <a:prstGeom prst="rect">
             <a:avLst/>
@@ -5074,7 +5074,7 @@
                 <a:ea typeface="Calibri" pitchFamily="34" charset="-122"/>
                 <a:cs typeface="Calibri" pitchFamily="34" charset="-120"/>
               </a:rPr>
-              <a:t>vrindaaianalytics.vercel.app</a:t>
+              <a:t>vrindaai.com</a:t>
             </a:r>
             <a:endParaRPr lang="en-US" sz="1600" dirty="0"/>
           </a:p>
